--- a/examples/duduppt-sample.pptx
+++ b/examples/duduppt-sample.pptx
@@ -1261,7 +1261,7 @@
                   <a:srgbClr val="FFFFFF"/>
                 </a:solidFill>
                 <a:latin typeface="Arial" pitchFamily="34" charset="0"/>
-                <a:ea typeface="Arial" pitchFamily="34" charset="-122"/>
+                <a:ea typeface="微软雅黑" pitchFamily="34" charset="-122"/>
                 <a:cs typeface="Arial" pitchFamily="34" charset="-120"/>
               </a:rPr>
               <a:t>AI Agent 开发现状与趋势</a:t>
@@ -1300,7 +1300,7 @@
                   <a:srgbClr val="C9CDD1"/>
                 </a:solidFill>
                 <a:latin typeface="Arial" pitchFamily="34" charset="0"/>
-                <a:ea typeface="Arial" pitchFamily="34" charset="-122"/>
+                <a:ea typeface="微软雅黑" pitchFamily="34" charset="-122"/>
                 <a:cs typeface="Arial" pitchFamily="34" charset="-120"/>
               </a:rPr>
               <a:t>从概念验证到生产部署的关键路径</a:t>
@@ -1359,7 +1359,7 @@
                   <a:srgbClr val="C9CDD1"/>
                 </a:solidFill>
                 <a:latin typeface="Arial" pitchFamily="34" charset="0"/>
-                <a:ea typeface="Arial" pitchFamily="34" charset="-122"/>
+                <a:ea typeface="微软雅黑" pitchFamily="34" charset="-122"/>
                 <a:cs typeface="Arial" pitchFamily="34" charset="-120"/>
               </a:rPr>
               <a:t>duduppt  |  2025</a:t>
@@ -1430,7 +1430,7 @@
                   <a:srgbClr val="12355B"/>
                 </a:solidFill>
                 <a:latin typeface="Arial" pitchFamily="34" charset="0"/>
-                <a:ea typeface="Arial" pitchFamily="34" charset="-122"/>
+                <a:ea typeface="微软雅黑" pitchFamily="34" charset="-122"/>
                 <a:cs typeface="Arial" pitchFamily="34" charset="-120"/>
               </a:rPr>
               <a:t>市场格局</a:t>
@@ -1469,7 +1469,7 @@
                   <a:srgbClr val="101820"/>
                 </a:solidFill>
                 <a:latin typeface="Arial" pitchFamily="34" charset="0"/>
-                <a:ea typeface="Arial" pitchFamily="34" charset="-122"/>
+                <a:ea typeface="微软雅黑" pitchFamily="34" charset="-122"/>
                 <a:cs typeface="Arial" pitchFamily="34" charset="-120"/>
               </a:rPr>
               <a:t>Agent 开发框架呈三强鼎立格局，生态尚未固化</a:t>
@@ -1520,14 +1520,14 @@
                             <a:srgbClr val="FFFFFF"/>
                           </a:solidFill>
                           <a:latin typeface="Arial" pitchFamily="34" charset="0"/>
-                          <a:ea typeface="Arial" pitchFamily="34" charset="-122"/>
+                          <a:ea typeface="微软雅黑" pitchFamily="34" charset="-122"/>
                           <a:cs typeface="Arial" pitchFamily="34" charset="-120"/>
                         </a:rPr>
                         <a:t>框架</a:t>
                       </a:r>
                       <a:endParaRPr lang="en-US" sz="1200" dirty="0">
                         <a:latin typeface="Arial" charset="0"/>
-                        <a:ea typeface="Arial" charset="0"/>
+                        <a:ea typeface="微软雅黑" charset="0"/>
                         <a:cs typeface="Arial" charset="0"/>
                       </a:endParaRPr>
                     </a:p>
@@ -1588,14 +1588,14 @@
                             <a:srgbClr val="FFFFFF"/>
                           </a:solidFill>
                           <a:latin typeface="Arial" pitchFamily="34" charset="0"/>
-                          <a:ea typeface="Arial" pitchFamily="34" charset="-122"/>
+                          <a:ea typeface="微软雅黑" pitchFamily="34" charset="-122"/>
                           <a:cs typeface="Arial" pitchFamily="34" charset="-120"/>
                         </a:rPr>
                         <a:t>市占率</a:t>
                       </a:r>
                       <a:endParaRPr lang="en-US" sz="1200" dirty="0">
                         <a:latin typeface="Arial" charset="0"/>
-                        <a:ea typeface="Arial" charset="0"/>
+                        <a:ea typeface="微软雅黑" charset="0"/>
                         <a:cs typeface="Arial" charset="0"/>
                       </a:endParaRPr>
                     </a:p>
@@ -1656,14 +1656,14 @@
                             <a:srgbClr val="FFFFFF"/>
                           </a:solidFill>
                           <a:latin typeface="Arial" pitchFamily="34" charset="0"/>
-                          <a:ea typeface="Arial" pitchFamily="34" charset="-122"/>
+                          <a:ea typeface="微软雅黑" pitchFamily="34" charset="-122"/>
                           <a:cs typeface="Arial" pitchFamily="34" charset="-120"/>
                         </a:rPr>
                         <a:t>核心优势</a:t>
                       </a:r>
                       <a:endParaRPr lang="en-US" sz="1200" dirty="0">
                         <a:latin typeface="Arial" charset="0"/>
-                        <a:ea typeface="Arial" charset="0"/>
+                        <a:ea typeface="微软雅黑" charset="0"/>
                         <a:cs typeface="Arial" charset="0"/>
                       </a:endParaRPr>
                     </a:p>
@@ -1726,14 +1726,14 @@
                             <a:srgbClr val="000000"/>
                           </a:solidFill>
                           <a:latin typeface="Arial" pitchFamily="34" charset="0"/>
-                          <a:ea typeface="Arial" pitchFamily="34" charset="-122"/>
+                          <a:ea typeface="微软雅黑" pitchFamily="34" charset="-122"/>
                           <a:cs typeface="Arial" pitchFamily="34" charset="-120"/>
                         </a:rPr>
                         <a:t>LangChain</a:t>
                       </a:r>
                       <a:endParaRPr lang="en-US" sz="1100" dirty="0">
                         <a:latin typeface="Arial" charset="0"/>
-                        <a:ea typeface="Arial" charset="0"/>
+                        <a:ea typeface="微软雅黑" charset="0"/>
                         <a:cs typeface="Arial" charset="0"/>
                       </a:endParaRPr>
                     </a:p>
@@ -1791,14 +1791,14 @@
                             <a:srgbClr val="000000"/>
                           </a:solidFill>
                           <a:latin typeface="Arial" pitchFamily="34" charset="0"/>
-                          <a:ea typeface="Arial" pitchFamily="34" charset="-122"/>
+                          <a:ea typeface="微软雅黑" pitchFamily="34" charset="-122"/>
                           <a:cs typeface="Arial" pitchFamily="34" charset="-120"/>
                         </a:rPr>
                         <a:t>43%</a:t>
                       </a:r>
                       <a:endParaRPr lang="en-US" sz="1100" dirty="0">
                         <a:latin typeface="Arial" charset="0"/>
-                        <a:ea typeface="Arial" charset="0"/>
+                        <a:ea typeface="微软雅黑" charset="0"/>
                         <a:cs typeface="Arial" charset="0"/>
                       </a:endParaRPr>
                     </a:p>
@@ -1856,14 +1856,14 @@
                             <a:srgbClr val="000000"/>
                           </a:solidFill>
                           <a:latin typeface="Arial" pitchFamily="34" charset="0"/>
-                          <a:ea typeface="Arial" pitchFamily="34" charset="-122"/>
+                          <a:ea typeface="微软雅黑" pitchFamily="34" charset="-122"/>
                           <a:cs typeface="Arial" pitchFamily="34" charset="-120"/>
                         </a:rPr>
                         <a:t>生态最丰富，社区最大</a:t>
                       </a:r>
                       <a:endParaRPr lang="en-US" sz="1100" dirty="0">
                         <a:latin typeface="Arial" charset="0"/>
-                        <a:ea typeface="Arial" charset="0"/>
+                        <a:ea typeface="微软雅黑" charset="0"/>
                         <a:cs typeface="Arial" charset="0"/>
                       </a:endParaRPr>
                     </a:p>
@@ -1923,14 +1923,14 @@
                             <a:srgbClr val="000000"/>
                           </a:solidFill>
                           <a:latin typeface="Arial" pitchFamily="34" charset="0"/>
-                          <a:ea typeface="Arial" pitchFamily="34" charset="-122"/>
+                          <a:ea typeface="微软雅黑" pitchFamily="34" charset="-122"/>
                           <a:cs typeface="Arial" pitchFamily="34" charset="-120"/>
                         </a:rPr>
                         <a:t>Semantic Kernel</a:t>
                       </a:r>
                       <a:endParaRPr lang="en-US" sz="1100" dirty="0">
                         <a:latin typeface="Arial" charset="0"/>
-                        <a:ea typeface="Arial" charset="0"/>
+                        <a:ea typeface="微软雅黑" charset="0"/>
                         <a:cs typeface="Arial" charset="0"/>
                       </a:endParaRPr>
                     </a:p>
@@ -1988,14 +1988,14 @@
                             <a:srgbClr val="000000"/>
                           </a:solidFill>
                           <a:latin typeface="Arial" pitchFamily="34" charset="0"/>
-                          <a:ea typeface="Arial" pitchFamily="34" charset="-122"/>
+                          <a:ea typeface="微软雅黑" pitchFamily="34" charset="-122"/>
                           <a:cs typeface="Arial" pitchFamily="34" charset="-120"/>
                         </a:rPr>
                         <a:t>28%</a:t>
                       </a:r>
                       <a:endParaRPr lang="en-US" sz="1100" dirty="0">
                         <a:latin typeface="Arial" charset="0"/>
-                        <a:ea typeface="Arial" charset="0"/>
+                        <a:ea typeface="微软雅黑" charset="0"/>
                         <a:cs typeface="Arial" charset="0"/>
                       </a:endParaRPr>
                     </a:p>
@@ -2053,14 +2053,14 @@
                             <a:srgbClr val="000000"/>
                           </a:solidFill>
                           <a:latin typeface="Arial" pitchFamily="34" charset="0"/>
-                          <a:ea typeface="Arial" pitchFamily="34" charset="-122"/>
+                          <a:ea typeface="微软雅黑" pitchFamily="34" charset="-122"/>
                           <a:cs typeface="Arial" pitchFamily="34" charset="-120"/>
                         </a:rPr>
                         <a:t>微软生态集成，企业级</a:t>
                       </a:r>
                       <a:endParaRPr lang="en-US" sz="1100" dirty="0">
                         <a:latin typeface="Arial" charset="0"/>
-                        <a:ea typeface="Arial" charset="0"/>
+                        <a:ea typeface="微软雅黑" charset="0"/>
                         <a:cs typeface="Arial" charset="0"/>
                       </a:endParaRPr>
                     </a:p>
@@ -2120,14 +2120,14 @@
                             <a:srgbClr val="000000"/>
                           </a:solidFill>
                           <a:latin typeface="Arial" pitchFamily="34" charset="0"/>
-                          <a:ea typeface="Arial" pitchFamily="34" charset="-122"/>
+                          <a:ea typeface="微软雅黑" pitchFamily="34" charset="-122"/>
                           <a:cs typeface="Arial" pitchFamily="34" charset="-120"/>
                         </a:rPr>
                         <a:t>CrewAI</a:t>
                       </a:r>
                       <a:endParaRPr lang="en-US" sz="1100" dirty="0">
                         <a:latin typeface="Arial" charset="0"/>
-                        <a:ea typeface="Arial" charset="0"/>
+                        <a:ea typeface="微软雅黑" charset="0"/>
                         <a:cs typeface="Arial" charset="0"/>
                       </a:endParaRPr>
                     </a:p>
@@ -2185,14 +2185,14 @@
                             <a:srgbClr val="000000"/>
                           </a:solidFill>
                           <a:latin typeface="Arial" pitchFamily="34" charset="0"/>
-                          <a:ea typeface="Arial" pitchFamily="34" charset="-122"/>
+                          <a:ea typeface="微软雅黑" pitchFamily="34" charset="-122"/>
                           <a:cs typeface="Arial" pitchFamily="34" charset="-120"/>
                         </a:rPr>
                         <a:t>15%</a:t>
                       </a:r>
                       <a:endParaRPr lang="en-US" sz="1100" dirty="0">
                         <a:latin typeface="Arial" charset="0"/>
-                        <a:ea typeface="Arial" charset="0"/>
+                        <a:ea typeface="微软雅黑" charset="0"/>
                         <a:cs typeface="Arial" charset="0"/>
                       </a:endParaRPr>
                     </a:p>
@@ -2250,14 +2250,14 @@
                             <a:srgbClr val="000000"/>
                           </a:solidFill>
                           <a:latin typeface="Arial" pitchFamily="34" charset="0"/>
-                          <a:ea typeface="Arial" pitchFamily="34" charset="-122"/>
+                          <a:ea typeface="微软雅黑" pitchFamily="34" charset="-122"/>
                           <a:cs typeface="Arial" pitchFamily="34" charset="-120"/>
                         </a:rPr>
                         <a:t>多Agent编排简单</a:t>
                       </a:r>
                       <a:endParaRPr lang="en-US" sz="1100" dirty="0">
                         <a:latin typeface="Arial" charset="0"/>
-                        <a:ea typeface="Arial" charset="0"/>
+                        <a:ea typeface="微软雅黑" charset="0"/>
                         <a:cs typeface="Arial" charset="0"/>
                       </a:endParaRPr>
                     </a:p>
@@ -2317,14 +2317,14 @@
                             <a:srgbClr val="000000"/>
                           </a:solidFill>
                           <a:latin typeface="Arial" pitchFamily="34" charset="0"/>
-                          <a:ea typeface="Arial" pitchFamily="34" charset="-122"/>
+                          <a:ea typeface="微软雅黑" pitchFamily="34" charset="-122"/>
                           <a:cs typeface="Arial" pitchFamily="34" charset="-120"/>
                         </a:rPr>
                         <a:t>其他</a:t>
                       </a:r>
                       <a:endParaRPr lang="en-US" sz="1100" dirty="0">
                         <a:latin typeface="Arial" charset="0"/>
-                        <a:ea typeface="Arial" charset="0"/>
+                        <a:ea typeface="微软雅黑" charset="0"/>
                         <a:cs typeface="Arial" charset="0"/>
                       </a:endParaRPr>
                     </a:p>
@@ -2382,14 +2382,14 @@
                             <a:srgbClr val="000000"/>
                           </a:solidFill>
                           <a:latin typeface="Arial" pitchFamily="34" charset="0"/>
-                          <a:ea typeface="Arial" pitchFamily="34" charset="-122"/>
+                          <a:ea typeface="微软雅黑" pitchFamily="34" charset="-122"/>
                           <a:cs typeface="Arial" pitchFamily="34" charset="-120"/>
                         </a:rPr>
                         <a:t>14%</a:t>
                       </a:r>
                       <a:endParaRPr lang="en-US" sz="1100" dirty="0">
                         <a:latin typeface="Arial" charset="0"/>
-                        <a:ea typeface="Arial" charset="0"/>
+                        <a:ea typeface="微软雅黑" charset="0"/>
                         <a:cs typeface="Arial" charset="0"/>
                       </a:endParaRPr>
                     </a:p>
@@ -2447,14 +2447,14 @@
                             <a:srgbClr val="000000"/>
                           </a:solidFill>
                           <a:latin typeface="Arial" pitchFamily="34" charset="0"/>
-                          <a:ea typeface="Arial" pitchFamily="34" charset="-122"/>
+                          <a:ea typeface="微软雅黑" pitchFamily="34" charset="-122"/>
                           <a:cs typeface="Arial" pitchFamily="34" charset="-120"/>
                         </a:rPr>
                         <a:t>AutoGPT、BabyAGI等</a:t>
                       </a:r>
                       <a:endParaRPr lang="en-US" sz="1100" dirty="0">
                         <a:latin typeface="Arial" charset="0"/>
-                        <a:ea typeface="Arial" charset="0"/>
+                        <a:ea typeface="微软雅黑" charset="0"/>
                         <a:cs typeface="Arial" charset="0"/>
                       </a:endParaRPr>
                     </a:p>
@@ -2553,7 +2553,7 @@
                   <a:srgbClr val="303030"/>
                 </a:solidFill>
                 <a:latin typeface="Arial" pitchFamily="34" charset="0"/>
-                <a:ea typeface="Arial" pitchFamily="34" charset="-122"/>
+                <a:ea typeface="微软雅黑" pitchFamily="34" charset="-122"/>
                 <a:cs typeface="Arial" pitchFamily="34" charset="-120"/>
               </a:rPr>
               <a:t>SO WHAT: 生态尚未固化，框架选择窗口期仍在。建议以 LangChain 为主栈，同时关注 Semantic Kernel 的企业级进展。</a:t>
@@ -2592,7 +2592,7 @@
                   <a:srgbClr val="999999"/>
                 </a:solidFill>
                 <a:latin typeface="Arial" pitchFamily="34" charset="0"/>
-                <a:ea typeface="Arial" pitchFamily="34" charset="-122"/>
+                <a:ea typeface="微软雅黑" pitchFamily="34" charset="-122"/>
                 <a:cs typeface="Arial" pitchFamily="34" charset="-120"/>
               </a:rPr>
               <a:t>2  |  duduppt  |  Confidential</a:t>
@@ -2663,7 +2663,7 @@
                   <a:srgbClr val="12355B"/>
                 </a:solidFill>
                 <a:latin typeface="Arial" pitchFamily="34" charset="0"/>
-                <a:ea typeface="Arial" pitchFamily="34" charset="-122"/>
+                <a:ea typeface="微软雅黑" pitchFamily="34" charset="-122"/>
                 <a:cs typeface="Arial" pitchFamily="34" charset="-120"/>
               </a:rPr>
               <a:t>核心瓶颈</a:t>
@@ -2702,7 +2702,7 @@
                   <a:srgbClr val="101820"/>
                 </a:solidFill>
                 <a:latin typeface="Arial" pitchFamily="34" charset="0"/>
-                <a:ea typeface="Arial" pitchFamily="34" charset="-122"/>
+                <a:ea typeface="微软雅黑" pitchFamily="34" charset="-122"/>
                 <a:cs typeface="Arial" pitchFamily="34" charset="-120"/>
               </a:rPr>
               <a:t>可靠性、成本、安全构成规模化"铁三角"瓶颈</a:t>
@@ -2768,7 +2768,7 @@
                   <a:srgbClr val="12355B"/>
                 </a:solidFill>
                 <a:latin typeface="Arial" pitchFamily="34" charset="0"/>
-                <a:ea typeface="Arial" pitchFamily="34" charset="-122"/>
+                <a:ea typeface="微软雅黑" pitchFamily="34" charset="-122"/>
                 <a:cs typeface="Arial" pitchFamily="34" charset="-120"/>
               </a:rPr>
               <a:t>22%</a:t>
@@ -2807,7 +2807,7 @@
                   <a:srgbClr val="101820"/>
                 </a:solidFill>
                 <a:latin typeface="Arial" pitchFamily="34" charset="0"/>
-                <a:ea typeface="Arial" pitchFamily="34" charset="-122"/>
+                <a:ea typeface="微软雅黑" pitchFamily="34" charset="-122"/>
                 <a:cs typeface="Arial" pitchFamily="34" charset="-120"/>
               </a:rPr>
               <a:t>工具调用失败率</a:t>
@@ -2846,7 +2846,7 @@
                   <a:srgbClr val="666666"/>
                 </a:solidFill>
                 <a:latin typeface="Arial" pitchFamily="34" charset="0"/>
-                <a:ea typeface="Arial" pitchFamily="34" charset="-122"/>
+                <a:ea typeface="微软雅黑" pitchFamily="34" charset="-122"/>
                 <a:cs typeface="Arial" pitchFamily="34" charset="-120"/>
               </a:rPr>
               <a:t>复杂任务链中单步失败概率</a:t>
@@ -2912,7 +2912,7 @@
                   <a:srgbClr val="12355B"/>
                 </a:solidFill>
                 <a:latin typeface="Arial" pitchFamily="34" charset="0"/>
-                <a:ea typeface="Arial" pitchFamily="34" charset="-122"/>
+                <a:ea typeface="微软雅黑" pitchFamily="34" charset="-122"/>
                 <a:cs typeface="Arial" pitchFamily="34" charset="-120"/>
               </a:rPr>
               <a:t>$0.47</a:t>
@@ -2951,7 +2951,7 @@
                   <a:srgbClr val="101820"/>
                 </a:solidFill>
                 <a:latin typeface="Arial" pitchFamily="34" charset="0"/>
-                <a:ea typeface="Arial" pitchFamily="34" charset="-122"/>
+                <a:ea typeface="微软雅黑" pitchFamily="34" charset="-122"/>
                 <a:cs typeface="Arial" pitchFamily="34" charset="-120"/>
               </a:rPr>
               <a:t>单次任务成本</a:t>
@@ -2990,7 +2990,7 @@
                   <a:srgbClr val="666666"/>
                 </a:solidFill>
                 <a:latin typeface="Arial" pitchFamily="34" charset="0"/>
-                <a:ea typeface="Arial" pitchFamily="34" charset="-122"/>
+                <a:ea typeface="微软雅黑" pitchFamily="34" charset="-122"/>
                 <a:cs typeface="Arial" pitchFamily="34" charset="-120"/>
               </a:rPr>
               <a:t>含 LLM 调用 + 工具执行</a:t>
@@ -3056,7 +3056,7 @@
                   <a:srgbClr val="12355B"/>
                 </a:solidFill>
                 <a:latin typeface="Arial" pitchFamily="34" charset="0"/>
-                <a:ea typeface="Arial" pitchFamily="34" charset="-122"/>
+                <a:ea typeface="微软雅黑" pitchFamily="34" charset="-122"/>
                 <a:cs typeface="Arial" pitchFamily="34" charset="-120"/>
               </a:rPr>
               <a:t>32%</a:t>
@@ -3095,7 +3095,7 @@
                   <a:srgbClr val="101820"/>
                 </a:solidFill>
                 <a:latin typeface="Arial" pitchFamily="34" charset="0"/>
-                <a:ea typeface="Arial" pitchFamily="34" charset="-122"/>
+                <a:ea typeface="微软雅黑" pitchFamily="34" charset="-122"/>
                 <a:cs typeface="Arial" pitchFamily="34" charset="-120"/>
               </a:rPr>
               <a:t>数据泄露风险</a:t>
@@ -3134,7 +3134,7 @@
                   <a:srgbClr val="666666"/>
                 </a:solidFill>
                 <a:latin typeface="Arial" pitchFamily="34" charset="0"/>
-                <a:ea typeface="Arial" pitchFamily="34" charset="-122"/>
+                <a:ea typeface="微软雅黑" pitchFamily="34" charset="-122"/>
                 <a:cs typeface="Arial" pitchFamily="34" charset="-120"/>
               </a:rPr>
               <a:t>企业遇 Agent 相关数据泄露</a:t>
@@ -3193,7 +3193,7 @@
                   <a:srgbClr val="303030"/>
                 </a:solidFill>
                 <a:latin typeface="Arial" pitchFamily="34" charset="0"/>
-                <a:ea typeface="Arial" pitchFamily="34" charset="-122"/>
+                <a:ea typeface="微软雅黑" pitchFamily="34" charset="-122"/>
                 <a:cs typeface="Arial" pitchFamily="34" charset="-120"/>
               </a:rPr>
               <a:t>SO WHAT: 三项瓶颈相互关联——降成本往往牺牲可靠性，提安全通常增加成本。需要组合方案而非单点优化。</a:t>
@@ -3232,7 +3232,7 @@
                   <a:srgbClr val="999999"/>
                 </a:solidFill>
                 <a:latin typeface="Arial" pitchFamily="34" charset="0"/>
-                <a:ea typeface="Arial" pitchFamily="34" charset="-122"/>
+                <a:ea typeface="微软雅黑" pitchFamily="34" charset="-122"/>
                 <a:cs typeface="Arial" pitchFamily="34" charset="-120"/>
               </a:rPr>
               <a:t>3  |  duduppt  |  Confidential</a:t>
@@ -3303,7 +3303,7 @@
                   <a:srgbClr val="12355B"/>
                 </a:solidFill>
                 <a:latin typeface="Arial" pitchFamily="34" charset="0"/>
-                <a:ea typeface="Arial" pitchFamily="34" charset="-122"/>
+                <a:ea typeface="微软雅黑" pitchFamily="34" charset="-122"/>
                 <a:cs typeface="Arial" pitchFamily="34" charset="-120"/>
               </a:rPr>
               <a:t>解决方案</a:t>
@@ -3342,7 +3342,7 @@
                   <a:srgbClr val="101820"/>
                 </a:solidFill>
                 <a:latin typeface="Arial" pitchFamily="34" charset="0"/>
-                <a:ea typeface="Arial" pitchFamily="34" charset="-122"/>
+                <a:ea typeface="微软雅黑" pitchFamily="34" charset="-122"/>
                 <a:cs typeface="Arial" pitchFamily="34" charset="-120"/>
               </a:rPr>
               <a:t>MCP + Guardrails + Caching 组合方案已验证有效</a:t>
@@ -3394,14 +3394,14 @@
                             <a:srgbClr val="FFFFFF"/>
                           </a:solidFill>
                           <a:latin typeface="Arial" pitchFamily="34" charset="0"/>
-                          <a:ea typeface="Arial" pitchFamily="34" charset="-122"/>
+                          <a:ea typeface="微软雅黑" pitchFamily="34" charset="-122"/>
                           <a:cs typeface="Arial" pitchFamily="34" charset="-120"/>
                         </a:rPr>
                         <a:t>方案</a:t>
                       </a:r>
                       <a:endParaRPr lang="en-US" sz="1200" dirty="0">
                         <a:latin typeface="Arial" charset="0"/>
-                        <a:ea typeface="Arial" charset="0"/>
+                        <a:ea typeface="微软雅黑" charset="0"/>
                         <a:cs typeface="Arial" charset="0"/>
                       </a:endParaRPr>
                     </a:p>
@@ -3462,14 +3462,14 @@
                             <a:srgbClr val="FFFFFF"/>
                           </a:solidFill>
                           <a:latin typeface="Arial" pitchFamily="34" charset="0"/>
-                          <a:ea typeface="Arial" pitchFamily="34" charset="-122"/>
+                          <a:ea typeface="微软雅黑" pitchFamily="34" charset="-122"/>
                           <a:cs typeface="Arial" pitchFamily="34" charset="-120"/>
                         </a:rPr>
                         <a:t>效果</a:t>
                       </a:r>
                       <a:endParaRPr lang="en-US" sz="1200" dirty="0">
                         <a:latin typeface="Arial" charset="0"/>
-                        <a:ea typeface="Arial" charset="0"/>
+                        <a:ea typeface="微软雅黑" charset="0"/>
                         <a:cs typeface="Arial" charset="0"/>
                       </a:endParaRPr>
                     </a:p>
@@ -3530,14 +3530,14 @@
                             <a:srgbClr val="FFFFFF"/>
                           </a:solidFill>
                           <a:latin typeface="Arial" pitchFamily="34" charset="0"/>
-                          <a:ea typeface="Arial" pitchFamily="34" charset="-122"/>
+                          <a:ea typeface="微软雅黑" pitchFamily="34" charset="-122"/>
                           <a:cs typeface="Arial" pitchFamily="34" charset="-120"/>
                         </a:rPr>
                         <a:t>实现周期</a:t>
                       </a:r>
                       <a:endParaRPr lang="en-US" sz="1200" dirty="0">
                         <a:latin typeface="Arial" charset="0"/>
-                        <a:ea typeface="Arial" charset="0"/>
+                        <a:ea typeface="微软雅黑" charset="0"/>
                         <a:cs typeface="Arial" charset="0"/>
                       </a:endParaRPr>
                     </a:p>
@@ -3598,14 +3598,14 @@
                             <a:srgbClr val="FFFFFF"/>
                           </a:solidFill>
                           <a:latin typeface="Arial" pitchFamily="34" charset="0"/>
-                          <a:ea typeface="Arial" pitchFamily="34" charset="-122"/>
+                          <a:ea typeface="微软雅黑" pitchFamily="34" charset="-122"/>
                           <a:cs typeface="Arial" pitchFamily="34" charset="-120"/>
                         </a:rPr>
                         <a:t>优先级</a:t>
                       </a:r>
                       <a:endParaRPr lang="en-US" sz="1200" dirty="0">
                         <a:latin typeface="Arial" charset="0"/>
-                        <a:ea typeface="Arial" charset="0"/>
+                        <a:ea typeface="微软雅黑" charset="0"/>
                         <a:cs typeface="Arial" charset="0"/>
                       </a:endParaRPr>
                     </a:p>
@@ -3668,14 +3668,14 @@
                             <a:srgbClr val="000000"/>
                           </a:solidFill>
                           <a:latin typeface="Arial" pitchFamily="34" charset="0"/>
-                          <a:ea typeface="Arial" pitchFamily="34" charset="-122"/>
+                          <a:ea typeface="微软雅黑" pitchFamily="34" charset="-122"/>
                           <a:cs typeface="Arial" pitchFamily="34" charset="-120"/>
                         </a:rPr>
                         <a:t>MCP 协议</a:t>
                       </a:r>
                       <a:endParaRPr lang="en-US" sz="1100" dirty="0">
                         <a:latin typeface="Arial" charset="0"/>
-                        <a:ea typeface="Arial" charset="0"/>
+                        <a:ea typeface="微软雅黑" charset="0"/>
                         <a:cs typeface="Arial" charset="0"/>
                       </a:endParaRPr>
                     </a:p>
@@ -3733,14 +3733,14 @@
                             <a:srgbClr val="000000"/>
                           </a:solidFill>
                           <a:latin typeface="Arial" pitchFamily="34" charset="0"/>
-                          <a:ea typeface="Arial" pitchFamily="34" charset="-122"/>
+                          <a:ea typeface="微软雅黑" pitchFamily="34" charset="-122"/>
                           <a:cs typeface="Arial" pitchFamily="34" charset="-120"/>
                         </a:rPr>
                         <a:t>↓ 40% 集成成本</a:t>
                       </a:r>
                       <a:endParaRPr lang="en-US" sz="1100" dirty="0">
                         <a:latin typeface="Arial" charset="0"/>
-                        <a:ea typeface="Arial" charset="0"/>
+                        <a:ea typeface="微软雅黑" charset="0"/>
                         <a:cs typeface="Arial" charset="0"/>
                       </a:endParaRPr>
                     </a:p>
@@ -3798,14 +3798,14 @@
                             <a:srgbClr val="000000"/>
                           </a:solidFill>
                           <a:latin typeface="Arial" pitchFamily="34" charset="0"/>
-                          <a:ea typeface="Arial" pitchFamily="34" charset="-122"/>
+                          <a:ea typeface="微软雅黑" pitchFamily="34" charset="-122"/>
                           <a:cs typeface="Arial" pitchFamily="34" charset="-120"/>
                         </a:rPr>
                         <a:t>1-2 个月</a:t>
                       </a:r>
                       <a:endParaRPr lang="en-US" sz="1100" dirty="0">
                         <a:latin typeface="Arial" charset="0"/>
-                        <a:ea typeface="Arial" charset="0"/>
+                        <a:ea typeface="微软雅黑" charset="0"/>
                         <a:cs typeface="Arial" charset="0"/>
                       </a:endParaRPr>
                     </a:p>
@@ -3863,14 +3863,14 @@
                             <a:srgbClr val="12355B"/>
                           </a:solidFill>
                           <a:latin typeface="Arial" pitchFamily="34" charset="0"/>
-                          <a:ea typeface="Arial" pitchFamily="34" charset="-122"/>
+                          <a:ea typeface="微软雅黑" pitchFamily="34" charset="-122"/>
                           <a:cs typeface="Arial" pitchFamily="34" charset="-120"/>
                         </a:rPr>
                         <a:t>P0</a:t>
                       </a:r>
                       <a:endParaRPr lang="en-US" sz="1100" dirty="0">
                         <a:latin typeface="Arial" charset="0"/>
-                        <a:ea typeface="Arial" charset="0"/>
+                        <a:ea typeface="微软雅黑" charset="0"/>
                         <a:cs typeface="Arial" charset="0"/>
                       </a:endParaRPr>
                     </a:p>
@@ -3930,14 +3930,14 @@
                             <a:srgbClr val="000000"/>
                           </a:solidFill>
                           <a:latin typeface="Arial" pitchFamily="34" charset="0"/>
-                          <a:ea typeface="Arial" pitchFamily="34" charset="-122"/>
+                          <a:ea typeface="微软雅黑" pitchFamily="34" charset="-122"/>
                           <a:cs typeface="Arial" pitchFamily="34" charset="-120"/>
                         </a:rPr>
                         <a:t>Guardrails</a:t>
                       </a:r>
                       <a:endParaRPr lang="en-US" sz="1100" dirty="0">
                         <a:latin typeface="Arial" charset="0"/>
-                        <a:ea typeface="Arial" charset="0"/>
+                        <a:ea typeface="微软雅黑" charset="0"/>
                         <a:cs typeface="Arial" charset="0"/>
                       </a:endParaRPr>
                     </a:p>
@@ -3995,14 +3995,14 @@
                             <a:srgbClr val="000000"/>
                           </a:solidFill>
                           <a:latin typeface="Arial" pitchFamily="34" charset="0"/>
-                          <a:ea typeface="Arial" pitchFamily="34" charset="-122"/>
+                          <a:ea typeface="微软雅黑" pitchFamily="34" charset="-122"/>
                           <a:cs typeface="Arial" pitchFamily="34" charset="-120"/>
                         </a:rPr>
                         <a:t>拦 89% 异常</a:t>
                       </a:r>
                       <a:endParaRPr lang="en-US" sz="1100" dirty="0">
                         <a:latin typeface="Arial" charset="0"/>
-                        <a:ea typeface="Arial" charset="0"/>
+                        <a:ea typeface="微软雅黑" charset="0"/>
                         <a:cs typeface="Arial" charset="0"/>
                       </a:endParaRPr>
                     </a:p>
@@ -4060,14 +4060,14 @@
                             <a:srgbClr val="000000"/>
                           </a:solidFill>
                           <a:latin typeface="Arial" pitchFamily="34" charset="0"/>
-                          <a:ea typeface="Arial" pitchFamily="34" charset="-122"/>
+                          <a:ea typeface="微软雅黑" pitchFamily="34" charset="-122"/>
                           <a:cs typeface="Arial" pitchFamily="34" charset="-120"/>
                         </a:rPr>
                         <a:t>2-3 个月</a:t>
                       </a:r>
                       <a:endParaRPr lang="en-US" sz="1100" dirty="0">
                         <a:latin typeface="Arial" charset="0"/>
-                        <a:ea typeface="Arial" charset="0"/>
+                        <a:ea typeface="微软雅黑" charset="0"/>
                         <a:cs typeface="Arial" charset="0"/>
                       </a:endParaRPr>
                     </a:p>
@@ -4125,14 +4125,14 @@
                             <a:srgbClr val="12355B"/>
                           </a:solidFill>
                           <a:latin typeface="Arial" pitchFamily="34" charset="0"/>
-                          <a:ea typeface="Arial" pitchFamily="34" charset="-122"/>
+                          <a:ea typeface="微软雅黑" pitchFamily="34" charset="-122"/>
                           <a:cs typeface="Arial" pitchFamily="34" charset="-120"/>
                         </a:rPr>
                         <a:t>P0</a:t>
                       </a:r>
                       <a:endParaRPr lang="en-US" sz="1100" dirty="0">
                         <a:latin typeface="Arial" charset="0"/>
-                        <a:ea typeface="Arial" charset="0"/>
+                        <a:ea typeface="微软雅黑" charset="0"/>
                         <a:cs typeface="Arial" charset="0"/>
                       </a:endParaRPr>
                     </a:p>
@@ -4192,14 +4192,14 @@
                             <a:srgbClr val="000000"/>
                           </a:solidFill>
                           <a:latin typeface="Arial" pitchFamily="34" charset="0"/>
-                          <a:ea typeface="Arial" pitchFamily="34" charset="-122"/>
+                          <a:ea typeface="微软雅黑" pitchFamily="34" charset="-122"/>
                           <a:cs typeface="Arial" pitchFamily="34" charset="-120"/>
                         </a:rPr>
                         <a:t>Caching</a:t>
                       </a:r>
                       <a:endParaRPr lang="en-US" sz="1100" dirty="0">
                         <a:latin typeface="Arial" charset="0"/>
-                        <a:ea typeface="Arial" charset="0"/>
+                        <a:ea typeface="微软雅黑" charset="0"/>
                         <a:cs typeface="Arial" charset="0"/>
                       </a:endParaRPr>
                     </a:p>
@@ -4257,14 +4257,14 @@
                             <a:srgbClr val="000000"/>
                           </a:solidFill>
                           <a:latin typeface="Arial" pitchFamily="34" charset="0"/>
-                          <a:ea typeface="Arial" pitchFamily="34" charset="-122"/>
+                          <a:ea typeface="微软雅黑" pitchFamily="34" charset="-122"/>
                           <a:cs typeface="Arial" pitchFamily="34" charset="-120"/>
                         </a:rPr>
                         <a:t>省 60% Token</a:t>
                       </a:r>
                       <a:endParaRPr lang="en-US" sz="1100" dirty="0">
                         <a:latin typeface="Arial" charset="0"/>
-                        <a:ea typeface="Arial" charset="0"/>
+                        <a:ea typeface="微软雅黑" charset="0"/>
                         <a:cs typeface="Arial" charset="0"/>
                       </a:endParaRPr>
                     </a:p>
@@ -4322,14 +4322,14 @@
                             <a:srgbClr val="000000"/>
                           </a:solidFill>
                           <a:latin typeface="Arial" pitchFamily="34" charset="0"/>
-                          <a:ea typeface="Arial" pitchFamily="34" charset="-122"/>
+                          <a:ea typeface="微软雅黑" pitchFamily="34" charset="-122"/>
                           <a:cs typeface="Arial" pitchFamily="34" charset="-120"/>
                         </a:rPr>
                         <a:t>0.5-1 个月</a:t>
                       </a:r>
                       <a:endParaRPr lang="en-US" sz="1100" dirty="0">
                         <a:latin typeface="Arial" charset="0"/>
-                        <a:ea typeface="Arial" charset="0"/>
+                        <a:ea typeface="微软雅黑" charset="0"/>
                         <a:cs typeface="Arial" charset="0"/>
                       </a:endParaRPr>
                     </a:p>
@@ -4387,14 +4387,14 @@
                             <a:srgbClr val="000000"/>
                           </a:solidFill>
                           <a:latin typeface="Arial" pitchFamily="34" charset="0"/>
-                          <a:ea typeface="Arial" pitchFamily="34" charset="-122"/>
+                          <a:ea typeface="微软雅黑" pitchFamily="34" charset="-122"/>
                           <a:cs typeface="Arial" pitchFamily="34" charset="-120"/>
                         </a:rPr>
                         <a:t>P1</a:t>
                       </a:r>
                       <a:endParaRPr lang="en-US" sz="1100" dirty="0">
                         <a:latin typeface="Arial" charset="0"/>
-                        <a:ea typeface="Arial" charset="0"/>
+                        <a:ea typeface="微软雅黑" charset="0"/>
                         <a:cs typeface="Arial" charset="0"/>
                       </a:endParaRPr>
                     </a:p>
@@ -4493,7 +4493,7 @@
                   <a:srgbClr val="303030"/>
                 </a:solidFill>
                 <a:latin typeface="Arial" pitchFamily="34" charset="0"/>
-                <a:ea typeface="Arial" pitchFamily="34" charset="-122"/>
+                <a:ea typeface="微软雅黑" pitchFamily="34" charset="-122"/>
                 <a:cs typeface="Arial" pitchFamily="34" charset="-120"/>
               </a:rPr>
               <a:t>SO WHAT: 三项组合可在 3-6 个月内实现 ROI 转正。建议优先落地 MCP + Caching（低成本高回报），再上 Guardrails（安全保障）。</a:t>
@@ -4532,7 +4532,7 @@
                   <a:srgbClr val="999999"/>
                 </a:solidFill>
                 <a:latin typeface="Arial" pitchFamily="34" charset="0"/>
-                <a:ea typeface="Arial" pitchFamily="34" charset="-122"/>
+                <a:ea typeface="微软雅黑" pitchFamily="34" charset="-122"/>
                 <a:cs typeface="Arial" pitchFamily="34" charset="-120"/>
               </a:rPr>
               <a:t>4  |  duduppt  |  Confidential</a:t>
@@ -4603,7 +4603,7 @@
                   <a:srgbClr val="12355B"/>
                 </a:solidFill>
                 <a:latin typeface="Arial" pitchFamily="34" charset="0"/>
-                <a:ea typeface="Arial" pitchFamily="34" charset="-122"/>
+                <a:ea typeface="微软雅黑" pitchFamily="34" charset="-122"/>
                 <a:cs typeface="Arial" pitchFamily="34" charset="-120"/>
               </a:rPr>
               <a:t>行动建议</a:t>
@@ -4642,7 +4642,7 @@
                   <a:srgbClr val="101820"/>
                 </a:solidFill>
                 <a:latin typeface="Arial" pitchFamily="34" charset="0"/>
-                <a:ea typeface="Arial" pitchFamily="34" charset="-122"/>
+                <a:ea typeface="微软雅黑" pitchFamily="34" charset="-122"/>
                 <a:cs typeface="Arial" pitchFamily="34" charset="-120"/>
               </a:rPr>
               <a:t>抓住窗口期，建立差异化 Agent 能力</a:t>
@@ -4721,7 +4721,7 @@
                   <a:srgbClr val="101820"/>
                 </a:solidFill>
                 <a:latin typeface="Arial" pitchFamily="34" charset="0"/>
-                <a:ea typeface="Arial" pitchFamily="34" charset="-122"/>
+                <a:ea typeface="微软雅黑" pitchFamily="34" charset="-122"/>
                 <a:cs typeface="Arial" pitchFamily="34" charset="-120"/>
               </a:rPr>
               <a:t>Q3 启动 PoC</a:t>
@@ -4760,7 +4760,7 @@
                   <a:srgbClr val="666666"/>
                 </a:solidFill>
                 <a:latin typeface="Arial" pitchFamily="34" charset="0"/>
-                <a:ea typeface="Arial" pitchFamily="34" charset="-122"/>
+                <a:ea typeface="微软雅黑" pitchFamily="34" charset="-122"/>
                 <a:cs typeface="Arial" pitchFamily="34" charset="-120"/>
               </a:rPr>
               <a:t>客服+内部工具</a:t>
@@ -4819,7 +4819,7 @@
                   <a:srgbClr val="101820"/>
                 </a:solidFill>
                 <a:latin typeface="Arial" pitchFamily="34" charset="0"/>
-                <a:ea typeface="Arial" pitchFamily="34" charset="-122"/>
+                <a:ea typeface="微软雅黑" pitchFamily="34" charset="-122"/>
                 <a:cs typeface="Arial" pitchFamily="34" charset="-120"/>
               </a:rPr>
               <a:t>Q4 试运行</a:t>
@@ -4858,7 +4858,7 @@
                   <a:srgbClr val="666666"/>
                 </a:solidFill>
                 <a:latin typeface="Arial" pitchFamily="34" charset="0"/>
-                <a:ea typeface="Arial" pitchFamily="34" charset="-122"/>
+                <a:ea typeface="微软雅黑" pitchFamily="34" charset="-122"/>
                 <a:cs typeface="Arial" pitchFamily="34" charset="-120"/>
               </a:rPr>
               <a:t>扩展至 3-5 业务线</a:t>
@@ -4917,7 +4917,7 @@
                   <a:srgbClr val="101820"/>
                 </a:solidFill>
                 <a:latin typeface="Arial" pitchFamily="34" charset="0"/>
-                <a:ea typeface="Arial" pitchFamily="34" charset="-122"/>
+                <a:ea typeface="微软雅黑" pitchFamily="34" charset="-122"/>
                 <a:cs typeface="Arial" pitchFamily="34" charset="-120"/>
               </a:rPr>
               <a:t>Q1 规模化</a:t>
@@ -4956,7 +4956,7 @@
                   <a:srgbClr val="666666"/>
                 </a:solidFill>
                 <a:latin typeface="Arial" pitchFamily="34" charset="0"/>
-                <a:ea typeface="Arial" pitchFamily="34" charset="-122"/>
+                <a:ea typeface="微软雅黑" pitchFamily="34" charset="-122"/>
                 <a:cs typeface="Arial" pitchFamily="34" charset="-120"/>
               </a:rPr>
               <a:t>全部门推广</a:t>
@@ -5042,7 +5042,7 @@
                   <a:srgbClr val="12355B"/>
                 </a:solidFill>
                 <a:latin typeface="Arial" pitchFamily="34" charset="0"/>
-                <a:ea typeface="Arial" pitchFamily="34" charset="-122"/>
+                <a:ea typeface="微软雅黑" pitchFamily="34" charset="-122"/>
                 <a:cs typeface="Arial" pitchFamily="34" charset="-120"/>
               </a:rPr>
               <a:t>选型</a:t>
@@ -5081,7 +5081,7 @@
                   <a:srgbClr val="303030"/>
                 </a:solidFill>
                 <a:latin typeface="Arial" pitchFamily="34" charset="0"/>
-                <a:ea typeface="Arial" pitchFamily="34" charset="-122"/>
+                <a:ea typeface="微软雅黑" pitchFamily="34" charset="-122"/>
                 <a:cs typeface="Arial" pitchFamily="34" charset="-120"/>
               </a:rPr>
               <a:t>以 LangChain 为主栈</a:t>
@@ -5098,7 +5098,7 @@
                   <a:srgbClr val="303030"/>
                 </a:solidFill>
                 <a:latin typeface="Arial" pitchFamily="34" charset="0"/>
-                <a:ea typeface="Arial" pitchFamily="34" charset="-122"/>
+                <a:ea typeface="微软雅黑" pitchFamily="34" charset="-122"/>
                 <a:cs typeface="Arial" pitchFamily="34" charset="-120"/>
               </a:rPr>
               <a:t>评估 Semantic Kernel</a:t>
@@ -5115,7 +5115,7 @@
                   <a:srgbClr val="303030"/>
                 </a:solidFill>
                 <a:latin typeface="Arial" pitchFamily="34" charset="0"/>
-                <a:ea typeface="Arial" pitchFamily="34" charset="-122"/>
+                <a:ea typeface="微软雅黑" pitchFamily="34" charset="-122"/>
                 <a:cs typeface="Arial" pitchFamily="34" charset="-120"/>
               </a:rPr>
               <a:t>备选方案</a:t>
@@ -5201,7 +5201,7 @@
                   <a:srgbClr val="12355B"/>
                 </a:solidFill>
                 <a:latin typeface="Arial" pitchFamily="34" charset="0"/>
-                <a:ea typeface="Arial" pitchFamily="34" charset="-122"/>
+                <a:ea typeface="微软雅黑" pitchFamily="34" charset="-122"/>
                 <a:cs typeface="Arial" pitchFamily="34" charset="-120"/>
               </a:rPr>
               <a:t>基建</a:t>
@@ -5240,7 +5240,7 @@
                   <a:srgbClr val="303030"/>
                 </a:solidFill>
                 <a:latin typeface="Arial" pitchFamily="34" charset="0"/>
-                <a:ea typeface="Arial" pitchFamily="34" charset="-122"/>
+                <a:ea typeface="微软雅黑" pitchFamily="34" charset="-122"/>
                 <a:cs typeface="Arial" pitchFamily="34" charset="-120"/>
               </a:rPr>
               <a:t>部署 MCP Server</a:t>
@@ -5257,7 +5257,7 @@
                   <a:srgbClr val="303030"/>
                 </a:solidFill>
                 <a:latin typeface="Arial" pitchFamily="34" charset="0"/>
-                <a:ea typeface="Arial" pitchFamily="34" charset="-122"/>
+                <a:ea typeface="微软雅黑" pitchFamily="34" charset="-122"/>
                 <a:cs typeface="Arial" pitchFamily="34" charset="-120"/>
               </a:rPr>
               <a:t>搭建 Guardrails</a:t>
@@ -5274,7 +5274,7 @@
                   <a:srgbClr val="303030"/>
                 </a:solidFill>
                 <a:latin typeface="Arial" pitchFamily="34" charset="0"/>
-                <a:ea typeface="Arial" pitchFamily="34" charset="-122"/>
+                <a:ea typeface="微软雅黑" pitchFamily="34" charset="-122"/>
                 <a:cs typeface="Arial" pitchFamily="34" charset="-120"/>
               </a:rPr>
               <a:t>配置 Caching Layer</a:t>
@@ -5360,7 +5360,7 @@
                   <a:srgbClr val="12355B"/>
                 </a:solidFill>
                 <a:latin typeface="Arial" pitchFamily="34" charset="0"/>
-                <a:ea typeface="Arial" pitchFamily="34" charset="-122"/>
+                <a:ea typeface="微软雅黑" pitchFamily="34" charset="-122"/>
                 <a:cs typeface="Arial" pitchFamily="34" charset="-120"/>
               </a:rPr>
               <a:t>团队</a:t>
@@ -5399,7 +5399,7 @@
                   <a:srgbClr val="303030"/>
                 </a:solidFill>
                 <a:latin typeface="Arial" pitchFamily="34" charset="0"/>
-                <a:ea typeface="Arial" pitchFamily="34" charset="-122"/>
+                <a:ea typeface="微软雅黑" pitchFamily="34" charset="-122"/>
                 <a:cs typeface="Arial" pitchFamily="34" charset="-120"/>
               </a:rPr>
               <a:t>组建 3-5 人 Agent 团队</a:t>
@@ -5416,7 +5416,7 @@
                   <a:srgbClr val="303030"/>
                 </a:solidFill>
                 <a:latin typeface="Arial" pitchFamily="34" charset="0"/>
-                <a:ea typeface="Arial" pitchFamily="34" charset="-122"/>
+                <a:ea typeface="微软雅黑" pitchFamily="34" charset="-122"/>
                 <a:cs typeface="Arial" pitchFamily="34" charset="-120"/>
               </a:rPr>
               <a:t>设立效能度量体系</a:t>
@@ -5433,7 +5433,7 @@
                   <a:srgbClr val="303030"/>
                 </a:solidFill>
                 <a:latin typeface="Arial" pitchFamily="34" charset="0"/>
-                <a:ea typeface="Arial" pitchFamily="34" charset="-122"/>
+                <a:ea typeface="微软雅黑" pitchFamily="34" charset="-122"/>
                 <a:cs typeface="Arial" pitchFamily="34" charset="-120"/>
               </a:rPr>
               <a:t>每双周迭代</a:t>
@@ -5472,7 +5472,7 @@
                   <a:srgbClr val="999999"/>
                 </a:solidFill>
                 <a:latin typeface="Arial" pitchFamily="34" charset="0"/>
-                <a:ea typeface="Arial" pitchFamily="34" charset="-122"/>
+                <a:ea typeface="微软雅黑" pitchFamily="34" charset="-122"/>
                 <a:cs typeface="Arial" pitchFamily="34" charset="-120"/>
               </a:rPr>
               <a:t>5  |  duduppt  |  Confidential</a:t>
